--- a/downloads/presentations/LS-TMP-018_Final_Design_Review_Slides_Template.pptx
+++ b/downloads/presentations/LS-TMP-018_Final_Design_Review_Slides_Template.pptx
@@ -3457,6 +3457,30 @@
           </a:p>
         </p:txBody>
       </p:sp>
+      <p:pic>
+        <p:nvPicPr>
+          <p:cNvPr id="11" name="Picture 10" descr="lockwoodstem-concept-a1-black-transparent.png"/>
+          <p:cNvPicPr>
+            <a:picLocks noChangeAspect="1"/>
+          </p:cNvPicPr>
+          <p:nvPr/>
+        </p:nvPicPr>
+        <p:blipFill>
+          <a:blip r:embed="rId2"/>
+          <a:stretch>
+            <a:fillRect/>
+          </a:stretch>
+        </p:blipFill>
+        <p:spPr>
+          <a:xfrm>
+            <a:off x="10180066" y="205740"/>
+            <a:ext cx="1584920" cy="473110"/>
+          </a:xfrm>
+          <a:prstGeom prst="rect">
+            <a:avLst/>
+          </a:prstGeom>
+        </p:spPr>
+      </p:pic>
     </p:spTree>
   </p:cSld>
   <p:clrMapOvr>
@@ -3932,6 +3956,30 @@
           </a:p>
         </p:txBody>
       </p:sp>
+      <p:pic>
+        <p:nvPicPr>
+          <p:cNvPr id="13" name="Picture 12" descr="lockwoodstem-concept-a1-black-transparent.png"/>
+          <p:cNvPicPr>
+            <a:picLocks noChangeAspect="1"/>
+          </p:cNvPicPr>
+          <p:nvPr/>
+        </p:nvPicPr>
+        <p:blipFill>
+          <a:blip r:embed="rId2"/>
+          <a:stretch>
+            <a:fillRect/>
+          </a:stretch>
+        </p:blipFill>
+        <p:spPr>
+          <a:xfrm>
+            <a:off x="10180066" y="205740"/>
+            <a:ext cx="1584920" cy="473110"/>
+          </a:xfrm>
+          <a:prstGeom prst="rect">
+            <a:avLst/>
+          </a:prstGeom>
+        </p:spPr>
+      </p:pic>
     </p:spTree>
   </p:cSld>
   <p:clrMapOvr>
@@ -4486,6 +4534,30 @@
           </a:p>
         </p:txBody>
       </p:sp>
+      <p:pic>
+        <p:nvPicPr>
+          <p:cNvPr id="16" name="Picture 15" descr="lockwoodstem-concept-a1-black-transparent.png"/>
+          <p:cNvPicPr>
+            <a:picLocks noChangeAspect="1"/>
+          </p:cNvPicPr>
+          <p:nvPr/>
+        </p:nvPicPr>
+        <p:blipFill>
+          <a:blip r:embed="rId2"/>
+          <a:stretch>
+            <a:fillRect/>
+          </a:stretch>
+        </p:blipFill>
+        <p:spPr>
+          <a:xfrm>
+            <a:off x="10180066" y="205740"/>
+            <a:ext cx="1584920" cy="473110"/>
+          </a:xfrm>
+          <a:prstGeom prst="rect">
+            <a:avLst/>
+          </a:prstGeom>
+        </p:spPr>
+      </p:pic>
     </p:spTree>
   </p:cSld>
   <p:clrMapOvr>
@@ -4925,6 +4997,30 @@
           </a:p>
         </p:txBody>
       </p:sp>
+      <p:pic>
+        <p:nvPicPr>
+          <p:cNvPr id="13" name="Picture 12" descr="lockwoodstem-concept-a1-black-transparent.png"/>
+          <p:cNvPicPr>
+            <a:picLocks noChangeAspect="1"/>
+          </p:cNvPicPr>
+          <p:nvPr/>
+        </p:nvPicPr>
+        <p:blipFill>
+          <a:blip r:embed="rId2"/>
+          <a:stretch>
+            <a:fillRect/>
+          </a:stretch>
+        </p:blipFill>
+        <p:spPr>
+          <a:xfrm>
+            <a:off x="10180066" y="205740"/>
+            <a:ext cx="1584920" cy="473110"/>
+          </a:xfrm>
+          <a:prstGeom prst="rect">
+            <a:avLst/>
+          </a:prstGeom>
+        </p:spPr>
+      </p:pic>
     </p:spTree>
   </p:cSld>
   <p:clrMapOvr>
@@ -5479,6 +5575,30 @@
           </a:p>
         </p:txBody>
       </p:sp>
+      <p:pic>
+        <p:nvPicPr>
+          <p:cNvPr id="16" name="Picture 15" descr="lockwoodstem-concept-a1-black-transparent.png"/>
+          <p:cNvPicPr>
+            <a:picLocks noChangeAspect="1"/>
+          </p:cNvPicPr>
+          <p:nvPr/>
+        </p:nvPicPr>
+        <p:blipFill>
+          <a:blip r:embed="rId2"/>
+          <a:stretch>
+            <a:fillRect/>
+          </a:stretch>
+        </p:blipFill>
+        <p:spPr>
+          <a:xfrm>
+            <a:off x="10180066" y="205740"/>
+            <a:ext cx="1584920" cy="473110"/>
+          </a:xfrm>
+          <a:prstGeom prst="rect">
+            <a:avLst/>
+          </a:prstGeom>
+        </p:spPr>
+      </p:pic>
     </p:spTree>
   </p:cSld>
   <p:clrMapOvr>
@@ -5918,6 +6038,30 @@
           </a:p>
         </p:txBody>
       </p:sp>
+      <p:pic>
+        <p:nvPicPr>
+          <p:cNvPr id="13" name="Picture 12" descr="lockwoodstem-concept-a1-black-transparent.png"/>
+          <p:cNvPicPr>
+            <a:picLocks noChangeAspect="1"/>
+          </p:cNvPicPr>
+          <p:nvPr/>
+        </p:nvPicPr>
+        <p:blipFill>
+          <a:blip r:embed="rId2"/>
+          <a:stretch>
+            <a:fillRect/>
+          </a:stretch>
+        </p:blipFill>
+        <p:spPr>
+          <a:xfrm>
+            <a:off x="10180066" y="205740"/>
+            <a:ext cx="1584920" cy="473110"/>
+          </a:xfrm>
+          <a:prstGeom prst="rect">
+            <a:avLst/>
+          </a:prstGeom>
+        </p:spPr>
+      </p:pic>
     </p:spTree>
   </p:cSld>
   <p:clrMapOvr>
@@ -6357,6 +6501,30 @@
           </a:p>
         </p:txBody>
       </p:sp>
+      <p:pic>
+        <p:nvPicPr>
+          <p:cNvPr id="13" name="Picture 12" descr="lockwoodstem-concept-a1-black-transparent.png"/>
+          <p:cNvPicPr>
+            <a:picLocks noChangeAspect="1"/>
+          </p:cNvPicPr>
+          <p:nvPr/>
+        </p:nvPicPr>
+        <p:blipFill>
+          <a:blip r:embed="rId2"/>
+          <a:stretch>
+            <a:fillRect/>
+          </a:stretch>
+        </p:blipFill>
+        <p:spPr>
+          <a:xfrm>
+            <a:off x="10180066" y="205740"/>
+            <a:ext cx="1584920" cy="473110"/>
+          </a:xfrm>
+          <a:prstGeom prst="rect">
+            <a:avLst/>
+          </a:prstGeom>
+        </p:spPr>
+      </p:pic>
     </p:spTree>
   </p:cSld>
   <p:clrMapOvr>
@@ -6911,6 +7079,30 @@
           </a:p>
         </p:txBody>
       </p:sp>
+      <p:pic>
+        <p:nvPicPr>
+          <p:cNvPr id="16" name="Picture 15" descr="lockwoodstem-concept-a1-black-transparent.png"/>
+          <p:cNvPicPr>
+            <a:picLocks noChangeAspect="1"/>
+          </p:cNvPicPr>
+          <p:nvPr/>
+        </p:nvPicPr>
+        <p:blipFill>
+          <a:blip r:embed="rId2"/>
+          <a:stretch>
+            <a:fillRect/>
+          </a:stretch>
+        </p:blipFill>
+        <p:spPr>
+          <a:xfrm>
+            <a:off x="10180066" y="205740"/>
+            <a:ext cx="1584920" cy="473110"/>
+          </a:xfrm>
+          <a:prstGeom prst="rect">
+            <a:avLst/>
+          </a:prstGeom>
+        </p:spPr>
+      </p:pic>
     </p:spTree>
   </p:cSld>
   <p:clrMapOvr>
@@ -7163,6 +7355,30 @@
           </a:p>
         </p:txBody>
       </p:sp>
+      <p:pic>
+        <p:nvPicPr>
+          <p:cNvPr id="8" name="Picture 7" descr="lockwoodstem-concept-a1-black-transparent.png"/>
+          <p:cNvPicPr>
+            <a:picLocks noChangeAspect="1"/>
+          </p:cNvPicPr>
+          <p:nvPr/>
+        </p:nvPicPr>
+        <p:blipFill>
+          <a:blip r:embed="rId2"/>
+          <a:stretch>
+            <a:fillRect/>
+          </a:stretch>
+        </p:blipFill>
+        <p:spPr>
+          <a:xfrm>
+            <a:off x="10180066" y="205740"/>
+            <a:ext cx="1584920" cy="473110"/>
+          </a:xfrm>
+          <a:prstGeom prst="rect">
+            <a:avLst/>
+          </a:prstGeom>
+        </p:spPr>
+      </p:pic>
     </p:spTree>
   </p:cSld>
   <p:clrMapOvr>
